--- a/מצגת הדגמה.pptx
+++ b/מצגת הדגמה.pptx
@@ -9053,7 +9053,7 @@
         <p:spPr>
           <a:xfrm>
             <a:off x="643468" y="643467"/>
-            <a:ext cx="4797776" cy="4567137"/>
+            <a:ext cx="4904716" cy="4567137"/>
           </a:xfrm>
         </p:spPr>
         <p:txBody>
@@ -9139,7 +9139,7 @@
                   <a:srgbClr val="FFFFFF"/>
                 </a:solidFill>
               </a:rPr>
-              <a:t>בהורדת התוכנה, הפעלתה, תנו לה לעבוד!</a:t>
+              <a:t>בהורדת התוכנה, הפעלתה ותנו לה לעבוד!</a:t>
             </a:r>
             <a:endParaRPr lang="en-US" kern="1200" dirty="0">
               <a:solidFill>
@@ -10400,7 +10400,9 @@
         </p:nvSpPr>
         <p:spPr/>
         <p:txBody>
-          <a:bodyPr/>
+          <a:bodyPr>
+            <a:normAutofit fontScale="92500" lnSpcReduction="10000"/>
+          </a:bodyPr>
           <a:lstStyle/>
           <a:p>
             <a:pPr marL="0" indent="0" algn="r">
@@ -10416,7 +10418,7 @@
             </a:r>
             <a:r>
               <a:rPr lang="he-IL" dirty="0"/>
-              <a:t>, עד החלטה על רעיון אתמול חלוקת משימות והננו כאן.</a:t>
+              <a:t>, עד ההחלטה על הרעיון אתמול חלוקת משימות, ואנחנו כאן להציג מולכם את המאמץ המשותף שלנו.</a:t>
             </a:r>
           </a:p>
           <a:p>
@@ -10424,6 +10426,50 @@
               <a:buNone/>
             </a:pPr>
             <a:endParaRPr lang="he-IL" dirty="0"/>
+          </a:p>
+          <a:p>
+            <a:pPr marL="0" indent="0" algn="r">
+              <a:buNone/>
+            </a:pPr>
+            <a:r>
+              <a:rPr lang="he-IL" dirty="0"/>
+              <a:t>ומה הלאה? </a:t>
+            </a:r>
+          </a:p>
+          <a:p>
+            <a:pPr marL="0" indent="0" algn="r">
+              <a:buNone/>
+            </a:pPr>
+            <a:r>
+              <a:rPr lang="he-IL" dirty="0"/>
+              <a:t>–אפליקציית בקרת הורים, סוגי משתמשים</a:t>
+            </a:r>
+          </a:p>
+          <a:p>
+            <a:pPr marL="0" indent="0" algn="r">
+              <a:buNone/>
+            </a:pPr>
+            <a:r>
+              <a:rPr lang="he-IL" dirty="0"/>
+              <a:t> –התאמה לכל משתמש </a:t>
+            </a:r>
+          </a:p>
+          <a:p>
+            <a:pPr marL="0" indent="0" algn="r" rtl="1">
+              <a:buNone/>
+            </a:pPr>
+            <a:r>
+              <a:rPr lang="he-IL" dirty="0"/>
+              <a:t>-הגדלת מודל </a:t>
+            </a:r>
+            <a:r>
+              <a:rPr lang="en-US" dirty="0"/>
+              <a:t> AI</a:t>
+            </a:r>
+            <a:r>
+              <a:rPr lang="he-IL" dirty="0"/>
+              <a:t> ושיפור השירות</a:t>
+            </a:r>
           </a:p>
           <a:p>
             <a:pPr marL="0" indent="0" algn="r">
@@ -10506,7 +10552,7 @@
                                         <p:tgtEl>
                                           <p:spTgt spid="3">
                                             <p:txEl>
-                                              <p:pRg st="3" end="3"/>
+                                              <p:pRg st="2" end="2"/>
                                             </p:txEl>
                                           </p:spTgt>
                                         </p:tgtEl>
@@ -10537,7 +10583,149 @@
                                         <p:tgtEl>
                                           <p:spTgt spid="3">
                                             <p:txEl>
+                                              <p:pRg st="3" end="3"/>
+                                            </p:txEl>
+                                          </p:spTgt>
+                                        </p:tgtEl>
+                                        <p:attrNameLst>
+                                          <p:attrName>style.visibility</p:attrName>
+                                        </p:attrNameLst>
+                                      </p:cBhvr>
+                                      <p:to>
+                                        <p:strVal val="visible"/>
+                                      </p:to>
+                                    </p:set>
+                                  </p:childTnLst>
+                                </p:cTn>
+                              </p:par>
+                              <p:par>
+                                <p:cTn id="9" presetID="1" presetClass="entr" presetSubtype="0" fill="hold" nodeType="withEffect">
+                                  <p:stCondLst>
+                                    <p:cond delay="0"/>
+                                  </p:stCondLst>
+                                  <p:childTnLst>
+                                    <p:set>
+                                      <p:cBhvr>
+                                        <p:cTn id="10" dur="1" fill="hold">
+                                          <p:stCondLst>
+                                            <p:cond delay="0"/>
+                                          </p:stCondLst>
+                                        </p:cTn>
+                                        <p:tgtEl>
+                                          <p:spTgt spid="3">
+                                            <p:txEl>
                                               <p:pRg st="4" end="4"/>
+                                            </p:txEl>
+                                          </p:spTgt>
+                                        </p:tgtEl>
+                                        <p:attrNameLst>
+                                          <p:attrName>style.visibility</p:attrName>
+                                        </p:attrNameLst>
+                                      </p:cBhvr>
+                                      <p:to>
+                                        <p:strVal val="visible"/>
+                                      </p:to>
+                                    </p:set>
+                                  </p:childTnLst>
+                                </p:cTn>
+                              </p:par>
+                              <p:par>
+                                <p:cTn id="11" presetID="1" presetClass="entr" presetSubtype="0" fill="hold" nodeType="withEffect">
+                                  <p:stCondLst>
+                                    <p:cond delay="0"/>
+                                  </p:stCondLst>
+                                  <p:childTnLst>
+                                    <p:set>
+                                      <p:cBhvr>
+                                        <p:cTn id="12" dur="1" fill="hold">
+                                          <p:stCondLst>
+                                            <p:cond delay="0"/>
+                                          </p:stCondLst>
+                                        </p:cTn>
+                                        <p:tgtEl>
+                                          <p:spTgt spid="3">
+                                            <p:txEl>
+                                              <p:pRg st="5" end="5"/>
+                                            </p:txEl>
+                                          </p:spTgt>
+                                        </p:tgtEl>
+                                        <p:attrNameLst>
+                                          <p:attrName>style.visibility</p:attrName>
+                                        </p:attrNameLst>
+                                      </p:cBhvr>
+                                      <p:to>
+                                        <p:strVal val="visible"/>
+                                      </p:to>
+                                    </p:set>
+                                  </p:childTnLst>
+                                </p:cTn>
+                              </p:par>
+                            </p:childTnLst>
+                          </p:cTn>
+                        </p:par>
+                      </p:childTnLst>
+                    </p:cTn>
+                  </p:par>
+                  <p:par>
+                    <p:cTn id="13" fill="hold">
+                      <p:stCondLst>
+                        <p:cond delay="indefinite"/>
+                      </p:stCondLst>
+                      <p:childTnLst>
+                        <p:par>
+                          <p:cTn id="14" fill="hold">
+                            <p:stCondLst>
+                              <p:cond delay="0"/>
+                            </p:stCondLst>
+                            <p:childTnLst>
+                              <p:par>
+                                <p:cTn id="15" presetID="1" presetClass="entr" presetSubtype="0" fill="hold" nodeType="clickEffect">
+                                  <p:stCondLst>
+                                    <p:cond delay="0"/>
+                                  </p:stCondLst>
+                                  <p:childTnLst>
+                                    <p:set>
+                                      <p:cBhvr>
+                                        <p:cTn id="16" dur="1" fill="hold">
+                                          <p:stCondLst>
+                                            <p:cond delay="0"/>
+                                          </p:stCondLst>
+                                        </p:cTn>
+                                        <p:tgtEl>
+                                          <p:spTgt spid="3">
+                                            <p:txEl>
+                                              <p:pRg st="7" end="7"/>
+                                            </p:txEl>
+                                          </p:spTgt>
+                                        </p:tgtEl>
+                                        <p:attrNameLst>
+                                          <p:attrName>style.visibility</p:attrName>
+                                        </p:attrNameLst>
+                                      </p:cBhvr>
+                                      <p:to>
+                                        <p:strVal val="visible"/>
+                                      </p:to>
+                                    </p:set>
+                                  </p:childTnLst>
+                                </p:cTn>
+                              </p:par>
+                              <p:par>
+                                <p:cTn id="17" presetID="1" presetClass="entr" presetSubtype="0" fill="hold" nodeType="withEffect">
+                                  <p:stCondLst>
+                                    <p:cond delay="0"/>
+                                  </p:stCondLst>
+                                  <p:childTnLst>
+                                    <p:set>
+                                      <p:cBhvr>
+                                        <p:cTn id="18" dur="1" fill="hold">
+                                          <p:stCondLst>
+                                            <p:cond delay="0"/>
+                                          </p:stCondLst>
+                                        </p:cTn>
+                                        <p:tgtEl>
+                                          <p:spTgt spid="3">
+                                            <p:txEl>
+                                              <p:pRg st="8" end="8"/>
                                             </p:txEl>
                                           </p:spTgt>
                                         </p:tgtEl>
